--- a/Streamlit.pptx
+++ b/Streamlit.pptx
@@ -17,6 +17,7 @@
     <p:sldId id="262" r:id="rId12"/>
     <p:sldId id="263" r:id="rId13"/>
     <p:sldId id="264" r:id="rId14"/>
+    <p:sldId id="265" r:id="rId15"/>
   </p:sldIdLst>
   <p:sldSz cy="5143500" cx="9144000"/>
   <p:notesSz cx="6858000" cy="9144000"/>
@@ -793,6 +794,105 @@
 </p:notes>
 </file>
 
+<file path=ppt/notesSlides/notesSlide10.xml><?xml version="1.0" encoding="utf-8"?>
+<p:notes xmlns:a="http://schemas.openxmlformats.org/drawingml/2006/main" xmlns:r="http://schemas.openxmlformats.org/officeDocument/2006/relationships" xmlns:mc="http://schemas.openxmlformats.org/markup-compatibility/2006" xmlns:mv="urn:schemas-microsoft-com:mac:vml" xmlns:p="http://schemas.openxmlformats.org/presentationml/2006/main" xmlns:c="http://schemas.openxmlformats.org/drawingml/2006/chart" xmlns:dgm="http://schemas.openxmlformats.org/drawingml/2006/diagram" xmlns:o="urn:schemas-microsoft-com:office:office" xmlns:v="urn:schemas-microsoft-com:vml" xmlns:pvml="urn:schemas-microsoft-com:office:powerpoint" xmlns:com="http://schemas.openxmlformats.org/drawingml/2006/compatibility" xmlns:p14="http://schemas.microsoft.com/office/powerpoint/2010/main" xmlns:p15="http://schemas.microsoft.com/office/powerpoint/2012/main" xmlns:ahyp="http://schemas.microsoft.com/office/drawing/2018/hyperlinkcolor" showMasterPhAnim="0" showMasterSp="0">
+  <p:cSld>
+    <p:spTree>
+      <p:nvGrpSpPr>
+        <p:cNvPr id="113" name="Shape 113"/>
+        <p:cNvGrpSpPr/>
+        <p:nvPr/>
+      </p:nvGrpSpPr>
+      <p:grpSpPr>
+        <a:xfrm>
+          <a:off x="0" y="0"/>
+          <a:ext cx="0" cy="0"/>
+          <a:chOff x="0" y="0"/>
+          <a:chExt cx="0" cy="0"/>
+        </a:xfrm>
+      </p:grpSpPr>
+      <p:sp>
+        <p:nvSpPr>
+          <p:cNvPr id="114" name="Google Shape;114;g39f8d5c97d5_0_49:notes"/>
+          <p:cNvSpPr/>
+          <p:nvPr>
+            <p:ph idx="2" type="sldImg"/>
+          </p:nvPr>
+        </p:nvSpPr>
+        <p:spPr>
+          <a:xfrm>
+            <a:off x="381300" y="685800"/>
+            <a:ext cx="6096000" cy="3429000"/>
+          </a:xfrm>
+          <a:custGeom>
+            <a:rect b="b" l="l" r="r" t="t"/>
+            <a:pathLst>
+              <a:path extrusionOk="0" h="120000" w="120000">
+                <a:moveTo>
+                  <a:pt x="0" y="0"/>
+                </a:moveTo>
+                <a:lnTo>
+                  <a:pt x="120000" y="0"/>
+                </a:lnTo>
+                <a:lnTo>
+                  <a:pt x="120000" y="120000"/>
+                </a:lnTo>
+                <a:lnTo>
+                  <a:pt x="0" y="120000"/>
+                </a:lnTo>
+                <a:close/>
+              </a:path>
+            </a:pathLst>
+          </a:custGeom>
+        </p:spPr>
+      </p:sp>
+      <p:sp>
+        <p:nvSpPr>
+          <p:cNvPr id="115" name="Google Shape;115;g39f8d5c97d5_0_49:notes"/>
+          <p:cNvSpPr txBox="1"/>
+          <p:nvPr>
+            <p:ph idx="1" type="body"/>
+          </p:nvPr>
+        </p:nvSpPr>
+        <p:spPr>
+          <a:xfrm>
+            <a:off x="685800" y="4343400"/>
+            <a:ext cx="5486400" cy="4114800"/>
+          </a:xfrm>
+          <a:prstGeom prst="rect">
+            <a:avLst/>
+          </a:prstGeom>
+        </p:spPr>
+        <p:txBody>
+          <a:bodyPr anchorCtr="0" anchor="t" bIns="91425" lIns="91425" spcFirstLastPara="1" rIns="91425" wrap="square" tIns="91425">
+            <a:noAutofit/>
+          </a:bodyPr>
+          <a:lstStyle/>
+          <a:p>
+            <a:pPr indent="0" lvl="0" marL="0" rtl="0" algn="l">
+              <a:spcBef>
+                <a:spcPts val="0"/>
+              </a:spcBef>
+              <a:spcAft>
+                <a:spcPts val="0"/>
+              </a:spcAft>
+              <a:buNone/>
+            </a:pPr>
+            <a:r>
+              <a:t/>
+            </a:r>
+            <a:endParaRPr/>
+          </a:p>
+        </p:txBody>
+      </p:sp>
+    </p:spTree>
+  </p:cSld>
+  <p:clrMapOvr>
+    <a:masterClrMapping/>
+  </p:clrMapOvr>
+</p:notes>
+</file>
+
 <file path=ppt/notesSlides/notesSlide2.xml><?xml version="1.0" encoding="utf-8"?>
 <p:notes xmlns:a="http://schemas.openxmlformats.org/drawingml/2006/main" xmlns:r="http://schemas.openxmlformats.org/officeDocument/2006/relationships" xmlns:mc="http://schemas.openxmlformats.org/markup-compatibility/2006" xmlns:mv="urn:schemas-microsoft-com:mac:vml" xmlns:p="http://schemas.openxmlformats.org/presentationml/2006/main" xmlns:c="http://schemas.openxmlformats.org/drawingml/2006/chart" xmlns:dgm="http://schemas.openxmlformats.org/drawingml/2006/diagram" xmlns:o="urn:schemas-microsoft-com:office:office" xmlns:v="urn:schemas-microsoft-com:vml" xmlns:pvml="urn:schemas-microsoft-com:office:powerpoint" xmlns:com="http://schemas.openxmlformats.org/drawingml/2006/compatibility" xmlns:p14="http://schemas.microsoft.com/office/powerpoint/2010/main" xmlns:p15="http://schemas.microsoft.com/office/powerpoint/2012/main" xmlns:ahyp="http://schemas.microsoft.com/office/drawing/2018/hyperlinkcolor" showMasterPhAnim="0" showMasterSp="0">
   <p:cSld>
@@ -1491,7 +1591,7 @@
   <p:cSld>
     <p:spTree>
       <p:nvGrpSpPr>
-        <p:cNvPr id="106" name="Shape 106"/>
+        <p:cNvPr id="105" name="Shape 105"/>
         <p:cNvGrpSpPr/>
         <p:nvPr/>
       </p:nvGrpSpPr>
@@ -1505,7 +1605,7 @@
       </p:grpSpPr>
       <p:sp>
         <p:nvSpPr>
-          <p:cNvPr id="107" name="Google Shape;107;g39f8d5c97d5_0_49:notes"/>
+          <p:cNvPr id="106" name="Google Shape;106;g39fb38164d9_0_4:notes"/>
           <p:cNvSpPr/>
           <p:nvPr>
             <p:ph idx="2" type="sldImg"/>
@@ -1540,7 +1640,7 @@
       </p:sp>
       <p:sp>
         <p:nvSpPr>
-          <p:cNvPr id="108" name="Google Shape;108;g39f8d5c97d5_0_49:notes"/>
+          <p:cNvPr id="107" name="Google Shape;107;g39fb38164d9_0_4:notes"/>
           <p:cNvSpPr txBox="1"/>
           <p:nvPr>
             <p:ph idx="1" type="body"/>
@@ -6370,6 +6470,222 @@
 </p:sld>
 </file>
 
+<file path=ppt/slides/slide10.xml><?xml version="1.0" encoding="utf-8"?>
+<p:sld xmlns:a="http://schemas.openxmlformats.org/drawingml/2006/main" xmlns:r="http://schemas.openxmlformats.org/officeDocument/2006/relationships" xmlns:mc="http://schemas.openxmlformats.org/markup-compatibility/2006" xmlns:mv="urn:schemas-microsoft-com:mac:vml" xmlns:p="http://schemas.openxmlformats.org/presentationml/2006/main" xmlns:c="http://schemas.openxmlformats.org/drawingml/2006/chart" xmlns:dgm="http://schemas.openxmlformats.org/drawingml/2006/diagram" xmlns:o="urn:schemas-microsoft-com:office:office" xmlns:v="urn:schemas-microsoft-com:vml" xmlns:pvml="urn:schemas-microsoft-com:office:powerpoint" xmlns:com="http://schemas.openxmlformats.org/drawingml/2006/compatibility" xmlns:p14="http://schemas.microsoft.com/office/powerpoint/2010/main" xmlns:p15="http://schemas.microsoft.com/office/powerpoint/2012/main" xmlns:ahyp="http://schemas.microsoft.com/office/drawing/2018/hyperlinkcolor">
+  <p:cSld>
+    <p:spTree>
+      <p:nvGrpSpPr>
+        <p:cNvPr id="116" name="Shape 116"/>
+        <p:cNvGrpSpPr/>
+        <p:nvPr/>
+      </p:nvGrpSpPr>
+      <p:grpSpPr>
+        <a:xfrm>
+          <a:off x="0" y="0"/>
+          <a:ext cx="0" cy="0"/>
+          <a:chOff x="0" y="0"/>
+          <a:chExt cx="0" cy="0"/>
+        </a:xfrm>
+      </p:grpSpPr>
+      <p:sp>
+        <p:nvSpPr>
+          <p:cNvPr id="117" name="Google Shape;117;p22"/>
+          <p:cNvSpPr txBox="1"/>
+          <p:nvPr>
+            <p:ph type="title"/>
+          </p:nvPr>
+        </p:nvSpPr>
+        <p:spPr>
+          <a:xfrm>
+            <a:off x="311700" y="445025"/>
+            <a:ext cx="8520600" cy="572700"/>
+          </a:xfrm>
+          <a:prstGeom prst="rect">
+            <a:avLst/>
+          </a:prstGeom>
+        </p:spPr>
+        <p:txBody>
+          <a:bodyPr anchorCtr="0" anchor="t" bIns="91425" lIns="91425" spcFirstLastPara="1" rIns="91425" wrap="square" tIns="91425">
+            <a:normAutofit fontScale="90000"/>
+          </a:bodyPr>
+          <a:lstStyle/>
+          <a:p>
+            <a:pPr indent="0" lvl="0" marL="0" rtl="0" algn="ctr">
+              <a:spcBef>
+                <a:spcPts val="0"/>
+              </a:spcBef>
+              <a:spcAft>
+                <a:spcPts val="0"/>
+              </a:spcAft>
+              <a:buNone/>
+            </a:pPr>
+            <a:r>
+              <a:rPr lang="en"/>
+              <a:t>MAPPING DEMO</a:t>
+            </a:r>
+            <a:endParaRPr/>
+          </a:p>
+        </p:txBody>
+      </p:sp>
+      <p:sp>
+        <p:nvSpPr>
+          <p:cNvPr id="118" name="Google Shape;118;p22"/>
+          <p:cNvSpPr txBox="1"/>
+          <p:nvPr>
+            <p:ph idx="1" type="body"/>
+          </p:nvPr>
+        </p:nvSpPr>
+        <p:spPr>
+          <a:xfrm>
+            <a:off x="311700" y="1152475"/>
+            <a:ext cx="8520600" cy="3416400"/>
+          </a:xfrm>
+          <a:prstGeom prst="rect">
+            <a:avLst/>
+          </a:prstGeom>
+        </p:spPr>
+        <p:txBody>
+          <a:bodyPr anchorCtr="0" anchor="t" bIns="91425" lIns="91425" spcFirstLastPara="1" rIns="91425" wrap="square" tIns="91425">
+            <a:normAutofit/>
+          </a:bodyPr>
+          <a:lstStyle/>
+          <a:p>
+            <a:pPr indent="0" lvl="0" marL="0" rtl="0" algn="l">
+              <a:spcBef>
+                <a:spcPts val="0"/>
+              </a:spcBef>
+              <a:spcAft>
+                <a:spcPts val="1200"/>
+              </a:spcAft>
+              <a:buNone/>
+            </a:pPr>
+            <a:r>
+              <a:t/>
+            </a:r>
+            <a:endParaRPr/>
+          </a:p>
+        </p:txBody>
+      </p:sp>
+      <p:pic>
+        <p:nvPicPr>
+          <p:cNvPr id="119" name="Google Shape;119;p22"/>
+          <p:cNvPicPr preferRelativeResize="0"/>
+          <p:nvPr/>
+        </p:nvPicPr>
+        <p:blipFill>
+          <a:blip r:embed="rId3">
+            <a:alphaModFix/>
+          </a:blip>
+          <a:stretch>
+            <a:fillRect/>
+          </a:stretch>
+        </p:blipFill>
+        <p:spPr>
+          <a:xfrm>
+            <a:off x="3724648" y="1239088"/>
+            <a:ext cx="2951800" cy="2920074"/>
+          </a:xfrm>
+          <a:prstGeom prst="rect">
+            <a:avLst/>
+          </a:prstGeom>
+          <a:noFill/>
+          <a:ln>
+            <a:noFill/>
+          </a:ln>
+        </p:spPr>
+      </p:pic>
+      <p:pic>
+        <p:nvPicPr>
+          <p:cNvPr id="120" name="Google Shape;120;p22"/>
+          <p:cNvPicPr preferRelativeResize="0"/>
+          <p:nvPr/>
+        </p:nvPicPr>
+        <p:blipFill>
+          <a:blip r:embed="rId4">
+            <a:alphaModFix/>
+          </a:blip>
+          <a:stretch>
+            <a:fillRect/>
+          </a:stretch>
+        </p:blipFill>
+        <p:spPr>
+          <a:xfrm>
+            <a:off x="6829875" y="1152477"/>
+            <a:ext cx="2249399" cy="1624924"/>
+          </a:xfrm>
+          <a:prstGeom prst="rect">
+            <a:avLst/>
+          </a:prstGeom>
+          <a:noFill/>
+          <a:ln>
+            <a:noFill/>
+          </a:ln>
+        </p:spPr>
+      </p:pic>
+      <p:pic>
+        <p:nvPicPr>
+          <p:cNvPr id="121" name="Google Shape;121;p22"/>
+          <p:cNvPicPr preferRelativeResize="0"/>
+          <p:nvPr/>
+        </p:nvPicPr>
+        <p:blipFill>
+          <a:blip r:embed="rId5">
+            <a:alphaModFix/>
+          </a:blip>
+          <a:stretch>
+            <a:fillRect/>
+          </a:stretch>
+        </p:blipFill>
+        <p:spPr>
+          <a:xfrm>
+            <a:off x="6799181" y="2777398"/>
+            <a:ext cx="2310792" cy="1624925"/>
+          </a:xfrm>
+          <a:prstGeom prst="rect">
+            <a:avLst/>
+          </a:prstGeom>
+          <a:noFill/>
+          <a:ln>
+            <a:noFill/>
+          </a:ln>
+        </p:spPr>
+      </p:pic>
+      <p:pic>
+        <p:nvPicPr>
+          <p:cNvPr id="122" name="Google Shape;122;p22"/>
+          <p:cNvPicPr preferRelativeResize="0"/>
+          <p:nvPr/>
+        </p:nvPicPr>
+        <p:blipFill>
+          <a:blip r:embed="rId6">
+            <a:alphaModFix/>
+          </a:blip>
+          <a:stretch>
+            <a:fillRect/>
+          </a:stretch>
+        </p:blipFill>
+        <p:spPr>
+          <a:xfrm>
+            <a:off x="192275" y="1239099"/>
+            <a:ext cx="3378954" cy="2920050"/>
+          </a:xfrm>
+          <a:prstGeom prst="rect">
+            <a:avLst/>
+          </a:prstGeom>
+          <a:noFill/>
+          <a:ln>
+            <a:noFill/>
+          </a:ln>
+        </p:spPr>
+      </p:pic>
+    </p:spTree>
+  </p:cSld>
+  <p:clrMapOvr>
+    <a:masterClrMapping/>
+  </p:clrMapOvr>
+</p:sld>
+</file>
+
 <file path=ppt/slides/slide2.xml><?xml version="1.0" encoding="utf-8"?>
 <p:sld xmlns:a="http://schemas.openxmlformats.org/drawingml/2006/main" xmlns:r="http://schemas.openxmlformats.org/officeDocument/2006/relationships" xmlns:mc="http://schemas.openxmlformats.org/markup-compatibility/2006" xmlns:mv="urn:schemas-microsoft-com:mac:vml" xmlns:p="http://schemas.openxmlformats.org/presentationml/2006/main" xmlns:c="http://schemas.openxmlformats.org/drawingml/2006/chart" xmlns:dgm="http://schemas.openxmlformats.org/drawingml/2006/diagram" xmlns:o="urn:schemas-microsoft-com:office:office" xmlns:v="urn:schemas-microsoft-com:vml" xmlns:pvml="urn:schemas-microsoft-com:office:powerpoint" xmlns:com="http://schemas.openxmlformats.org/drawingml/2006/compatibility" xmlns:p14="http://schemas.microsoft.com/office/powerpoint/2010/main" xmlns:p15="http://schemas.microsoft.com/office/powerpoint/2012/main" xmlns:ahyp="http://schemas.microsoft.com/office/drawing/2018/hyperlinkcolor">
   <p:cSld>
@@ -7281,7 +7597,7 @@
                   <a:schemeClr val="dk1"/>
                 </a:solidFill>
               </a:rPr>
-              <a:t>Simulated retail data from 10 Massachusetts cities</a:t>
+              <a:t>Simulated retail data</a:t>
             </a:r>
             <a:endParaRPr sz="1500">
               <a:solidFill>
@@ -7533,8 +7849,8 @@
         </p:blipFill>
         <p:spPr>
           <a:xfrm>
-            <a:off x="1625325" y="2571750"/>
-            <a:ext cx="6454374" cy="2286000"/>
+            <a:off x="4977799" y="1083800"/>
+            <a:ext cx="4071051" cy="3553750"/>
           </a:xfrm>
           <a:prstGeom prst="rect">
             <a:avLst/>
@@ -7561,8 +7877,8 @@
         </p:blipFill>
         <p:spPr>
           <a:xfrm>
-            <a:off x="2149522" y="1047622"/>
-            <a:ext cx="5297700" cy="1421325"/>
+            <a:off x="311694" y="1654525"/>
+            <a:ext cx="4439875" cy="1834450"/>
           </a:xfrm>
           <a:prstGeom prst="rect">
             <a:avLst/>
@@ -7632,7 +7948,11 @@
             </a:pPr>
             <a:r>
               <a:rPr lang="en"/>
-              <a:t>PLOTTING DEMO</a:t>
+              <a:t>Visualization </a:t>
+            </a:r>
+            <a:r>
+              <a:rPr lang="en"/>
+              <a:t>DEMO (1)</a:t>
             </a:r>
             <a:endParaRPr/>
           </a:p>
@@ -7693,8 +8013,8 @@
         </p:blipFill>
         <p:spPr>
           <a:xfrm>
-            <a:off x="311712" y="1152475"/>
-            <a:ext cx="3239884" cy="3416400"/>
+            <a:off x="154700" y="1124985"/>
+            <a:ext cx="3421332" cy="3580600"/>
           </a:xfrm>
           <a:prstGeom prst="rect">
             <a:avLst/>
@@ -7721,36 +8041,8 @@
         </p:blipFill>
         <p:spPr>
           <a:xfrm>
-            <a:off x="3897375" y="1045025"/>
-            <a:ext cx="4991042" cy="2449850"/>
-          </a:xfrm>
-          <a:prstGeom prst="rect">
-            <a:avLst/>
-          </a:prstGeom>
-          <a:noFill/>
-          <a:ln>
-            <a:noFill/>
-          </a:ln>
-        </p:spPr>
-      </p:pic>
-      <p:pic>
-        <p:nvPicPr>
-          <p:cNvPr id="105" name="Google Shape;105;p20"/>
-          <p:cNvPicPr preferRelativeResize="0"/>
-          <p:nvPr/>
-        </p:nvPicPr>
-        <p:blipFill>
-          <a:blip r:embed="rId5">
-            <a:alphaModFix/>
-          </a:blip>
-          <a:stretch>
-            <a:fillRect/>
-          </a:stretch>
-        </p:blipFill>
-        <p:spPr>
-          <a:xfrm>
-            <a:off x="3755100" y="3522177"/>
-            <a:ext cx="5340849" cy="1373525"/>
+            <a:off x="3726475" y="1707275"/>
+            <a:ext cx="5105824" cy="2157775"/>
           </a:xfrm>
           <a:prstGeom prst="rect">
             <a:avLst/>
@@ -7774,7 +8066,7 @@
   <p:cSld>
     <p:spTree>
       <p:nvGrpSpPr>
-        <p:cNvPr id="109" name="Shape 109"/>
+        <p:cNvPr id="108" name="Shape 108"/>
         <p:cNvGrpSpPr/>
         <p:nvPr/>
       </p:nvGrpSpPr>
@@ -7788,7 +8080,7 @@
       </p:grpSpPr>
       <p:sp>
         <p:nvSpPr>
-          <p:cNvPr id="110" name="Google Shape;110;p21"/>
+          <p:cNvPr id="109" name="Google Shape;109;p21"/>
           <p:cNvSpPr txBox="1"/>
           <p:nvPr>
             <p:ph type="title"/>
@@ -7816,11 +8108,31 @@
               <a:spcAft>
                 <a:spcPts val="0"/>
               </a:spcAft>
+              <a:buClr>
+                <a:schemeClr val="dk1"/>
+              </a:buClr>
+              <a:buSzPct val="39285"/>
+              <a:buFont typeface="Arial"/>
               <a:buNone/>
             </a:pPr>
             <a:r>
               <a:rPr lang="en"/>
-              <a:t>MAPPING DEMO</a:t>
+              <a:t>Visualization DEMO (2)</a:t>
+            </a:r>
+            <a:endParaRPr/>
+          </a:p>
+          <a:p>
+            <a:pPr indent="0" lvl="0" marL="0" rtl="0" algn="l">
+              <a:spcBef>
+                <a:spcPts val="0"/>
+              </a:spcBef>
+              <a:spcAft>
+                <a:spcPts val="0"/>
+              </a:spcAft>
+              <a:buNone/>
+            </a:pPr>
+            <a:r>
+              <a:t/>
             </a:r>
             <a:endParaRPr/>
           </a:p>
@@ -7828,7 +8140,7 @@
       </p:sp>
       <p:sp>
         <p:nvSpPr>
-          <p:cNvPr id="111" name="Google Shape;111;p21"/>
+          <p:cNvPr id="110" name="Google Shape;110;p21"/>
           <p:cNvSpPr txBox="1"/>
           <p:nvPr>
             <p:ph idx="1" type="body"/>
@@ -7867,7 +8179,7 @@
       </p:sp>
       <p:pic>
         <p:nvPicPr>
-          <p:cNvPr id="112" name="Google Shape;112;p21"/>
+          <p:cNvPr id="111" name="Google Shape;111;p21"/>
           <p:cNvPicPr preferRelativeResize="0"/>
           <p:nvPr/>
         </p:nvPicPr>
@@ -7881,8 +8193,8 @@
         </p:blipFill>
         <p:spPr>
           <a:xfrm>
-            <a:off x="244050" y="1152475"/>
-            <a:ext cx="3545566" cy="3416400"/>
+            <a:off x="184075" y="1477100"/>
+            <a:ext cx="4253675" cy="2460850"/>
           </a:xfrm>
           <a:prstGeom prst="rect">
             <a:avLst/>
@@ -7895,7 +8207,7 @@
       </p:pic>
       <p:pic>
         <p:nvPicPr>
-          <p:cNvPr id="113" name="Google Shape;113;p21"/>
+          <p:cNvPr id="112" name="Google Shape;112;p21"/>
           <p:cNvPicPr preferRelativeResize="0"/>
           <p:nvPr/>
         </p:nvPicPr>
@@ -7909,8 +8221,8 @@
         </p:blipFill>
         <p:spPr>
           <a:xfrm>
-            <a:off x="3869800" y="1967375"/>
-            <a:ext cx="5119474" cy="1720675"/>
+            <a:off x="4616525" y="1756749"/>
+            <a:ext cx="4429250" cy="2029600"/>
           </a:xfrm>
           <a:prstGeom prst="rect">
             <a:avLst/>
